--- a/Slides/Module-17-Packages-Maven-and-JUnit.pptx
+++ b/Slides/Module-17-Packages-Maven-and-JUnit.pptx
@@ -115,7 +115,7 @@
   <p:extLst>
     <p:ext uri="{521415D9-36F7-43E2-AB2F-B90AF26B5E84}">
       <p14:sectionLst xmlns:p14="http://schemas.microsoft.com/office/powerpoint/2010/main">
-        <p14:section name="Module 17" id="{aa21486a-f5d8-aeb5-5ffd-c846035475e1}">
+        <p14:section name="Module 17" id="{ca2205e7-9f31-f8b9-f16e-d8c89dce7ca0}">
           <p14:sldIdLst>
             <p14:sldId id="256"/>
             <p14:sldId id="257"/>
@@ -9861,7 +9861,7 @@
                   <a:srgbClr val="F89820"/>
                 </a:solidFill>
               </a:rPr>
-              <a:t>Next: Module 18, GUIs with Swing</a:t>
+              <a:t>Next: Module 18, GUIs with JavaFX</a:t>
             </a:r>
             <a:endParaRPr lang="en-US" sz="1250" dirty="0"/>
           </a:p>
